--- a/1.数学基礎/1.数学基礎.pptx
+++ b/1.数学基礎/1.数学基礎.pptx
@@ -6,6 +6,7 @@
   </p:sldMasterIdLst>
   <p:sldIdLst>
     <p:sldId id="256" r:id="rId2"/>
+    <p:sldId id="257" r:id="rId3"/>
   </p:sldIdLst>
   <p:sldSz cx="12192000" cy="6858000"/>
   <p:notesSz cx="6858000" cy="9144000"/>
@@ -104,6 +105,11 @@
       </a:defRPr>
     </a:lvl9pPr>
   </p:defaultTextStyle>
+  <p:extLst>
+    <p:ext uri="{EFAFB233-063F-42B5-8137-9DF3F51BA10A}">
+      <p15:sldGuideLst xmlns:p15="http://schemas.microsoft.com/office/powerpoint/2012/main"/>
+    </p:ext>
+  </p:extLst>
 </p:presentation>
 </file>
 
@@ -254,7 +260,7 @@
           <a:p>
             <a:fld id="{48D79098-B2A3-4501-B40E-BD153E9A77CC}" type="datetimeFigureOut">
               <a:rPr kumimoji="1" lang="ja-JP" altLang="en-US" smtClean="0"/>
-              <a:t>2026/3/29</a:t>
+              <a:t>2026/4/21</a:t>
             </a:fld>
             <a:endParaRPr kumimoji="1" lang="ja-JP" altLang="en-US"/>
           </a:p>
@@ -484,7 +490,7 @@
           <a:p>
             <a:fld id="{48D79098-B2A3-4501-B40E-BD153E9A77CC}" type="datetimeFigureOut">
               <a:rPr kumimoji="1" lang="ja-JP" altLang="en-US" smtClean="0"/>
-              <a:t>2026/3/29</a:t>
+              <a:t>2026/4/21</a:t>
             </a:fld>
             <a:endParaRPr kumimoji="1" lang="ja-JP" altLang="en-US"/>
           </a:p>
@@ -724,7 +730,7 @@
           <a:p>
             <a:fld id="{48D79098-B2A3-4501-B40E-BD153E9A77CC}" type="datetimeFigureOut">
               <a:rPr kumimoji="1" lang="ja-JP" altLang="en-US" smtClean="0"/>
-              <a:t>2026/3/29</a:t>
+              <a:t>2026/4/21</a:t>
             </a:fld>
             <a:endParaRPr kumimoji="1" lang="ja-JP" altLang="en-US"/>
           </a:p>
@@ -954,7 +960,7 @@
           <a:p>
             <a:fld id="{48D79098-B2A3-4501-B40E-BD153E9A77CC}" type="datetimeFigureOut">
               <a:rPr kumimoji="1" lang="ja-JP" altLang="en-US" smtClean="0"/>
-              <a:t>2026/3/29</a:t>
+              <a:t>2026/4/21</a:t>
             </a:fld>
             <a:endParaRPr kumimoji="1" lang="ja-JP" altLang="en-US"/>
           </a:p>
@@ -1229,7 +1235,7 @@
           <a:p>
             <a:fld id="{48D79098-B2A3-4501-B40E-BD153E9A77CC}" type="datetimeFigureOut">
               <a:rPr kumimoji="1" lang="ja-JP" altLang="en-US" smtClean="0"/>
-              <a:t>2026/3/29</a:t>
+              <a:t>2026/4/21</a:t>
             </a:fld>
             <a:endParaRPr kumimoji="1" lang="ja-JP" altLang="en-US"/>
           </a:p>
@@ -1558,7 +1564,7 @@
           <a:p>
             <a:fld id="{48D79098-B2A3-4501-B40E-BD153E9A77CC}" type="datetimeFigureOut">
               <a:rPr kumimoji="1" lang="ja-JP" altLang="en-US" smtClean="0"/>
-              <a:t>2026/3/29</a:t>
+              <a:t>2026/4/21</a:t>
             </a:fld>
             <a:endParaRPr kumimoji="1" lang="ja-JP" altLang="en-US"/>
           </a:p>
@@ -2034,7 +2040,7 @@
           <a:p>
             <a:fld id="{48D79098-B2A3-4501-B40E-BD153E9A77CC}" type="datetimeFigureOut">
               <a:rPr kumimoji="1" lang="ja-JP" altLang="en-US" smtClean="0"/>
-              <a:t>2026/3/29</a:t>
+              <a:t>2026/4/21</a:t>
             </a:fld>
             <a:endParaRPr kumimoji="1" lang="ja-JP" altLang="en-US"/>
           </a:p>
@@ -2175,7 +2181,7 @@
           <a:p>
             <a:fld id="{48D79098-B2A3-4501-B40E-BD153E9A77CC}" type="datetimeFigureOut">
               <a:rPr kumimoji="1" lang="ja-JP" altLang="en-US" smtClean="0"/>
-              <a:t>2026/3/29</a:t>
+              <a:t>2026/4/21</a:t>
             </a:fld>
             <a:endParaRPr kumimoji="1" lang="ja-JP" altLang="en-US"/>
           </a:p>
@@ -2288,7 +2294,7 @@
           <a:p>
             <a:fld id="{48D79098-B2A3-4501-B40E-BD153E9A77CC}" type="datetimeFigureOut">
               <a:rPr kumimoji="1" lang="ja-JP" altLang="en-US" smtClean="0"/>
-              <a:t>2026/3/29</a:t>
+              <a:t>2026/4/21</a:t>
             </a:fld>
             <a:endParaRPr kumimoji="1" lang="ja-JP" altLang="en-US"/>
           </a:p>
@@ -2631,7 +2637,7 @@
           <a:p>
             <a:fld id="{48D79098-B2A3-4501-B40E-BD153E9A77CC}" type="datetimeFigureOut">
               <a:rPr kumimoji="1" lang="ja-JP" altLang="en-US" smtClean="0"/>
-              <a:t>2026/3/29</a:t>
+              <a:t>2026/4/21</a:t>
             </a:fld>
             <a:endParaRPr kumimoji="1" lang="ja-JP" altLang="en-US"/>
           </a:p>
@@ -2919,7 +2925,7 @@
           <a:p>
             <a:fld id="{48D79098-B2A3-4501-B40E-BD153E9A77CC}" type="datetimeFigureOut">
               <a:rPr kumimoji="1" lang="ja-JP" altLang="en-US" smtClean="0"/>
-              <a:t>2026/3/29</a:t>
+              <a:t>2026/4/21</a:t>
             </a:fld>
             <a:endParaRPr kumimoji="1" lang="ja-JP" altLang="en-US"/>
           </a:p>
@@ -3192,7 +3198,7 @@
           <a:p>
             <a:fld id="{48D79098-B2A3-4501-B40E-BD153E9A77CC}" type="datetimeFigureOut">
               <a:rPr kumimoji="1" lang="ja-JP" altLang="en-US" smtClean="0"/>
-              <a:t>2026/3/29</a:t>
+              <a:t>2026/4/21</a:t>
             </a:fld>
             <a:endParaRPr kumimoji="1" lang="ja-JP" altLang="en-US"/>
           </a:p>
@@ -3625,7 +3631,12 @@
             <p:ph type="ctrTitle"/>
           </p:nvPr>
         </p:nvSpPr>
-        <p:spPr/>
+        <p:spPr>
+          <a:xfrm>
+            <a:off x="1524000" y="868362"/>
+            <a:ext cx="9144000" cy="2387600"/>
+          </a:xfrm>
+        </p:spPr>
         <p:txBody>
           <a:bodyPr>
             <a:normAutofit/>
@@ -3659,9 +3670,16 @@
             <p:ph type="subTitle" idx="1"/>
           </p:nvPr>
         </p:nvSpPr>
-        <p:spPr/>
-        <p:txBody>
-          <a:bodyPr/>
+        <p:spPr>
+          <a:xfrm>
+            <a:off x="1524000" y="3814475"/>
+            <a:ext cx="9144000" cy="406544"/>
+          </a:xfrm>
+        </p:spPr>
+        <p:txBody>
+          <a:bodyPr>
+            <a:normAutofit lnSpcReduction="10000"/>
+          </a:bodyPr>
           <a:lstStyle/>
           <a:p>
             <a:r>
@@ -3684,15 +3702,16 @@
               <a:rPr lang="ja-JP" altLang="en-US" dirty="0"/>
               <a:t>指数</a:t>
             </a:r>
-            <a:br>
+            <a:r>
               <a:rPr lang="en-US" altLang="ja-JP" dirty="0"/>
-            </a:br>
-            <a:r>
-              <a:rPr lang="ja-JP" altLang="en-US"/>
+              <a:t>/</a:t>
+            </a:r>
+            <a:r>
+              <a:rPr lang="ja-JP" altLang="en-US" dirty="0"/>
               <a:t>比</a:t>
             </a:r>
             <a:r>
-              <a:rPr lang="en-US" altLang="ja-JP"/>
+              <a:rPr lang="en-US" altLang="ja-JP" dirty="0"/>
               <a:t>/</a:t>
             </a:r>
             <a:r>
@@ -3711,6 +3730,275 @@
     <p:extLst>
       <p:ext uri="{BB962C8B-B14F-4D97-AF65-F5344CB8AC3E}">
         <p14:creationId xmlns:p14="http://schemas.microsoft.com/office/powerpoint/2010/main" val="3042820108"/>
+      </p:ext>
+    </p:extLst>
+  </p:cSld>
+  <p:clrMapOvr>
+    <a:masterClrMapping/>
+  </p:clrMapOvr>
+</p:sld>
+</file>
+
+<file path=ppt/slides/slide2.xml><?xml version="1.0" encoding="utf-8"?>
+<p:sld xmlns:a="http://schemas.openxmlformats.org/drawingml/2006/main" xmlns:r="http://schemas.openxmlformats.org/officeDocument/2006/relationships" xmlns:p="http://schemas.openxmlformats.org/presentationml/2006/main">
+  <p:cSld>
+    <p:spTree>
+      <p:nvGrpSpPr>
+        <p:cNvPr id="1" name=""/>
+        <p:cNvGrpSpPr/>
+        <p:nvPr/>
+      </p:nvGrpSpPr>
+      <p:grpSpPr>
+        <a:xfrm>
+          <a:off x="0" y="0"/>
+          <a:ext cx="0" cy="0"/>
+          <a:chOff x="0" y="0"/>
+          <a:chExt cx="0" cy="0"/>
+        </a:xfrm>
+      </p:grpSpPr>
+      <p:sp>
+        <p:nvSpPr>
+          <p:cNvPr id="5" name="テキスト ボックス 4">
+            <a:extLst>
+              <a:ext uri="{FF2B5EF4-FFF2-40B4-BE49-F238E27FC236}">
+                <a16:creationId xmlns:a16="http://schemas.microsoft.com/office/drawing/2014/main" id="{DB2DC6C6-F487-A6AE-1CF9-8924A3C7479D}"/>
+              </a:ext>
+            </a:extLst>
+          </p:cNvPr>
+          <p:cNvSpPr txBox="1"/>
+          <p:nvPr/>
+        </p:nvSpPr>
+        <p:spPr>
+          <a:xfrm>
+            <a:off x="309272" y="183560"/>
+            <a:ext cx="2031325" cy="646331"/>
+          </a:xfrm>
+          <a:prstGeom prst="rect">
+            <a:avLst/>
+          </a:prstGeom>
+          <a:noFill/>
+        </p:spPr>
+        <p:txBody>
+          <a:bodyPr wrap="none" rtlCol="0">
+            <a:spAutoFit/>
+          </a:bodyPr>
+          <a:lstStyle/>
+          <a:p>
+            <a:r>
+              <a:rPr lang="ja-JP" altLang="en-US" sz="3600" dirty="0"/>
+              <a:t>五則演算</a:t>
+            </a:r>
+            <a:endParaRPr kumimoji="1" lang="ja-JP" altLang="en-US" sz="3600" dirty="0"/>
+          </a:p>
+        </p:txBody>
+      </p:sp>
+      <p:sp>
+        <p:nvSpPr>
+          <p:cNvPr id="6" name="テキスト ボックス 5">
+            <a:extLst>
+              <a:ext uri="{FF2B5EF4-FFF2-40B4-BE49-F238E27FC236}">
+                <a16:creationId xmlns:a16="http://schemas.microsoft.com/office/drawing/2014/main" id="{692A73F6-84FB-975A-746F-07257065D549}"/>
+              </a:ext>
+            </a:extLst>
+          </p:cNvPr>
+          <p:cNvSpPr txBox="1"/>
+          <p:nvPr/>
+        </p:nvSpPr>
+        <p:spPr>
+          <a:xfrm>
+            <a:off x="464702" y="1060015"/>
+            <a:ext cx="4493538" cy="461665"/>
+          </a:xfrm>
+          <a:prstGeom prst="rect">
+            <a:avLst/>
+          </a:prstGeom>
+          <a:noFill/>
+        </p:spPr>
+        <p:txBody>
+          <a:bodyPr wrap="none" rtlCol="0">
+            <a:spAutoFit/>
+          </a:bodyPr>
+          <a:lstStyle/>
+          <a:p>
+            <a:r>
+              <a:rPr lang="ja-JP" altLang="en-US" sz="2400" b="1" u="sng" dirty="0"/>
+              <a:t>加算・減算・乗算・除算・剰余</a:t>
+            </a:r>
+            <a:endParaRPr kumimoji="1" lang="ja-JP" altLang="en-US" sz="2400" b="1" u="sng" dirty="0"/>
+          </a:p>
+        </p:txBody>
+      </p:sp>
+      <p:sp>
+        <p:nvSpPr>
+          <p:cNvPr id="7" name="テキスト ボックス 6">
+            <a:extLst>
+              <a:ext uri="{FF2B5EF4-FFF2-40B4-BE49-F238E27FC236}">
+                <a16:creationId xmlns:a16="http://schemas.microsoft.com/office/drawing/2014/main" id="{2A6AC6EA-676A-D852-92D6-9CAD17D5F9DA}"/>
+              </a:ext>
+            </a:extLst>
+          </p:cNvPr>
+          <p:cNvSpPr txBox="1"/>
+          <p:nvPr/>
+        </p:nvSpPr>
+        <p:spPr>
+          <a:xfrm>
+            <a:off x="4928527" y="1152348"/>
+            <a:ext cx="1569660" cy="369332"/>
+          </a:xfrm>
+          <a:prstGeom prst="rect">
+            <a:avLst/>
+          </a:prstGeom>
+          <a:noFill/>
+        </p:spPr>
+        <p:txBody>
+          <a:bodyPr wrap="none" rtlCol="0">
+            <a:spAutoFit/>
+          </a:bodyPr>
+          <a:lstStyle/>
+          <a:p>
+            <a:r>
+              <a:rPr kumimoji="1" lang="ja-JP" altLang="en-US" dirty="0"/>
+              <a:t>全て合わせて</a:t>
+            </a:r>
+          </a:p>
+        </p:txBody>
+      </p:sp>
+      <p:sp>
+        <p:nvSpPr>
+          <p:cNvPr id="8" name="テキスト ボックス 7">
+            <a:extLst>
+              <a:ext uri="{FF2B5EF4-FFF2-40B4-BE49-F238E27FC236}">
+                <a16:creationId xmlns:a16="http://schemas.microsoft.com/office/drawing/2014/main" id="{5938AE2D-0F6D-C3B3-A278-F3ED2A3AAC71}"/>
+              </a:ext>
+            </a:extLst>
+          </p:cNvPr>
+          <p:cNvSpPr txBox="1"/>
+          <p:nvPr/>
+        </p:nvSpPr>
+        <p:spPr>
+          <a:xfrm>
+            <a:off x="6645078" y="859961"/>
+            <a:ext cx="2236510" cy="707886"/>
+          </a:xfrm>
+          <a:prstGeom prst="rect">
+            <a:avLst/>
+          </a:prstGeom>
+          <a:noFill/>
+        </p:spPr>
+        <p:txBody>
+          <a:bodyPr wrap="none" rtlCol="0">
+            <a:spAutoFit/>
+          </a:bodyPr>
+          <a:lstStyle/>
+          <a:p>
+            <a:r>
+              <a:rPr kumimoji="1" lang="ja-JP" altLang="en-US" sz="4000" b="1" dirty="0">
+                <a:solidFill>
+                  <a:srgbClr val="FF0000"/>
+                </a:solidFill>
+              </a:rPr>
+              <a:t>五則演算</a:t>
+            </a:r>
+          </a:p>
+        </p:txBody>
+      </p:sp>
+      <p:sp>
+        <p:nvSpPr>
+          <p:cNvPr id="9" name="テキスト ボックス 8">
+            <a:extLst>
+              <a:ext uri="{FF2B5EF4-FFF2-40B4-BE49-F238E27FC236}">
+                <a16:creationId xmlns:a16="http://schemas.microsoft.com/office/drawing/2014/main" id="{6495A1E7-E963-02A3-E3D8-6768BF93A477}"/>
+              </a:ext>
+            </a:extLst>
+          </p:cNvPr>
+          <p:cNvSpPr txBox="1"/>
+          <p:nvPr/>
+        </p:nvSpPr>
+        <p:spPr>
+          <a:xfrm>
+            <a:off x="8881588" y="1152348"/>
+            <a:ext cx="1569660" cy="369332"/>
+          </a:xfrm>
+          <a:prstGeom prst="rect">
+            <a:avLst/>
+          </a:prstGeom>
+          <a:noFill/>
+        </p:spPr>
+        <p:txBody>
+          <a:bodyPr wrap="none" rtlCol="0">
+            <a:spAutoFit/>
+          </a:bodyPr>
+          <a:lstStyle/>
+          <a:p>
+            <a:r>
+              <a:rPr kumimoji="1" lang="ja-JP" altLang="en-US" dirty="0"/>
+              <a:t>と呼びます。</a:t>
+            </a:r>
+          </a:p>
+        </p:txBody>
+      </p:sp>
+      <p:sp>
+        <p:nvSpPr>
+          <p:cNvPr id="15" name="テキスト ボックス 14">
+            <a:extLst>
+              <a:ext uri="{FF2B5EF4-FFF2-40B4-BE49-F238E27FC236}">
+                <a16:creationId xmlns:a16="http://schemas.microsoft.com/office/drawing/2014/main" id="{1D878414-A1F3-222A-A76B-C4854BA28C9F}"/>
+              </a:ext>
+            </a:extLst>
+          </p:cNvPr>
+          <p:cNvSpPr txBox="1"/>
+          <p:nvPr/>
+        </p:nvSpPr>
+        <p:spPr>
+          <a:xfrm>
+            <a:off x="464702" y="1751804"/>
+            <a:ext cx="4219425" cy="738664"/>
+          </a:xfrm>
+          <a:prstGeom prst="rect">
+            <a:avLst/>
+          </a:prstGeom>
+          <a:noFill/>
+        </p:spPr>
+        <p:txBody>
+          <a:bodyPr wrap="none" rtlCol="0">
+            <a:spAutoFit/>
+          </a:bodyPr>
+          <a:lstStyle/>
+          <a:p>
+            <a:r>
+              <a:rPr lang="ja-JP" altLang="en-US" sz="2400" b="1" dirty="0"/>
+              <a:t>加算</a:t>
+            </a:r>
+            <a:r>
+              <a:rPr lang="en-US" altLang="ja-JP" sz="2400" b="1" dirty="0"/>
+              <a:t>(Add)</a:t>
+            </a:r>
+          </a:p>
+          <a:p>
+            <a:r>
+              <a:rPr kumimoji="1" lang="ja-JP" altLang="en-US" dirty="0"/>
+              <a:t>足し算。＋で表す。　</a:t>
+            </a:r>
+            <a:r>
+              <a:rPr kumimoji="1" lang="en-US" altLang="ja-JP" dirty="0"/>
+              <a:t>1+2=3,</a:t>
+            </a:r>
+            <a:r>
+              <a:rPr kumimoji="1" lang="ja-JP" altLang="en-US" dirty="0"/>
+              <a:t>　</a:t>
+            </a:r>
+            <a:r>
+              <a:rPr kumimoji="1" lang="en-US" altLang="ja-JP" dirty="0"/>
+              <a:t>2+3=5</a:t>
+            </a:r>
+            <a:endParaRPr kumimoji="1" lang="ja-JP" altLang="en-US" dirty="0"/>
+          </a:p>
+        </p:txBody>
+      </p:sp>
+    </p:spTree>
+    <p:extLst>
+      <p:ext uri="{BB962C8B-B14F-4D97-AF65-F5344CB8AC3E}">
+        <p14:creationId xmlns:p14="http://schemas.microsoft.com/office/powerpoint/2010/main" val="554772578"/>
       </p:ext>
     </p:extLst>
   </p:cSld>
